--- a/EIBE_CS_ARS_멘트.pptx
+++ b/EIBE_CS_ARS_멘트.pptx
@@ -104,6 +104,11 @@
       </a:defRPr>
     </a:lvl9pPr>
   </p:defaultTextStyle>
+  <p:extLst>
+    <p:ext uri="{EFAFB233-063F-42B5-8137-9DF3F51BA10A}">
+      <p15:sldGuideLst xmlns:p15="http://schemas.microsoft.com/office/powerpoint/2012/main"/>
+    </p:ext>
+  </p:extLst>
 </p:presentation>
 </file>
 
@@ -254,7 +259,7 @@
           <a:p>
             <a:fld id="{13F3FF9B-A5AD-4354-BFCA-3B0FF879B822}" type="datetimeFigureOut">
               <a:rPr lang="ko-KR" altLang="en-US" smtClean="0"/>
-              <a:t>2026-01-08</a:t>
+              <a:t>2026-01-09</a:t>
             </a:fld>
             <a:endParaRPr lang="ko-KR" altLang="en-US"/>
           </a:p>
@@ -452,7 +457,7 @@
           <a:p>
             <a:fld id="{13F3FF9B-A5AD-4354-BFCA-3B0FF879B822}" type="datetimeFigureOut">
               <a:rPr lang="ko-KR" altLang="en-US" smtClean="0"/>
-              <a:t>2026-01-08</a:t>
+              <a:t>2026-01-09</a:t>
             </a:fld>
             <a:endParaRPr lang="ko-KR" altLang="en-US"/>
           </a:p>
@@ -660,7 +665,7 @@
           <a:p>
             <a:fld id="{13F3FF9B-A5AD-4354-BFCA-3B0FF879B822}" type="datetimeFigureOut">
               <a:rPr lang="ko-KR" altLang="en-US" smtClean="0"/>
-              <a:t>2026-01-08</a:t>
+              <a:t>2026-01-09</a:t>
             </a:fld>
             <a:endParaRPr lang="ko-KR" altLang="en-US"/>
           </a:p>
@@ -858,7 +863,7 @@
           <a:p>
             <a:fld id="{13F3FF9B-A5AD-4354-BFCA-3B0FF879B822}" type="datetimeFigureOut">
               <a:rPr lang="ko-KR" altLang="en-US" smtClean="0"/>
-              <a:t>2026-01-08</a:t>
+              <a:t>2026-01-09</a:t>
             </a:fld>
             <a:endParaRPr lang="ko-KR" altLang="en-US"/>
           </a:p>
@@ -1133,7 +1138,7 @@
           <a:p>
             <a:fld id="{13F3FF9B-A5AD-4354-BFCA-3B0FF879B822}" type="datetimeFigureOut">
               <a:rPr lang="ko-KR" altLang="en-US" smtClean="0"/>
-              <a:t>2026-01-08</a:t>
+              <a:t>2026-01-09</a:t>
             </a:fld>
             <a:endParaRPr lang="ko-KR" altLang="en-US"/>
           </a:p>
@@ -1398,7 +1403,7 @@
           <a:p>
             <a:fld id="{13F3FF9B-A5AD-4354-BFCA-3B0FF879B822}" type="datetimeFigureOut">
               <a:rPr lang="ko-KR" altLang="en-US" smtClean="0"/>
-              <a:t>2026-01-08</a:t>
+              <a:t>2026-01-09</a:t>
             </a:fld>
             <a:endParaRPr lang="ko-KR" altLang="en-US"/>
           </a:p>
@@ -1810,7 +1815,7 @@
           <a:p>
             <a:fld id="{13F3FF9B-A5AD-4354-BFCA-3B0FF879B822}" type="datetimeFigureOut">
               <a:rPr lang="ko-KR" altLang="en-US" smtClean="0"/>
-              <a:t>2026-01-08</a:t>
+              <a:t>2026-01-09</a:t>
             </a:fld>
             <a:endParaRPr lang="ko-KR" altLang="en-US"/>
           </a:p>
@@ -1951,7 +1956,7 @@
           <a:p>
             <a:fld id="{13F3FF9B-A5AD-4354-BFCA-3B0FF879B822}" type="datetimeFigureOut">
               <a:rPr lang="ko-KR" altLang="en-US" smtClean="0"/>
-              <a:t>2026-01-08</a:t>
+              <a:t>2026-01-09</a:t>
             </a:fld>
             <a:endParaRPr lang="ko-KR" altLang="en-US"/>
           </a:p>
@@ -2064,7 +2069,7 @@
           <a:p>
             <a:fld id="{13F3FF9B-A5AD-4354-BFCA-3B0FF879B822}" type="datetimeFigureOut">
               <a:rPr lang="ko-KR" altLang="en-US" smtClean="0"/>
-              <a:t>2026-01-08</a:t>
+              <a:t>2026-01-09</a:t>
             </a:fld>
             <a:endParaRPr lang="ko-KR" altLang="en-US"/>
           </a:p>
@@ -2375,7 +2380,7 @@
           <a:p>
             <a:fld id="{13F3FF9B-A5AD-4354-BFCA-3B0FF879B822}" type="datetimeFigureOut">
               <a:rPr lang="ko-KR" altLang="en-US" smtClean="0"/>
-              <a:t>2026-01-08</a:t>
+              <a:t>2026-01-09</a:t>
             </a:fld>
             <a:endParaRPr lang="ko-KR" altLang="en-US"/>
           </a:p>
@@ -2663,7 +2668,7 @@
           <a:p>
             <a:fld id="{13F3FF9B-A5AD-4354-BFCA-3B0FF879B822}" type="datetimeFigureOut">
               <a:rPr lang="ko-KR" altLang="en-US" smtClean="0"/>
-              <a:t>2026-01-08</a:t>
+              <a:t>2026-01-09</a:t>
             </a:fld>
             <a:endParaRPr lang="ko-KR" altLang="en-US"/>
           </a:p>
@@ -2904,7 +2909,7 @@
           <a:p>
             <a:fld id="{13F3FF9B-A5AD-4354-BFCA-3B0FF879B822}" type="datetimeFigureOut">
               <a:rPr lang="ko-KR" altLang="en-US" smtClean="0"/>
-              <a:t>2026-01-08</a:t>
+              <a:t>2026-01-09</a:t>
             </a:fld>
             <a:endParaRPr lang="ko-KR" altLang="en-US"/>
           </a:p>
@@ -3424,7 +3429,7 @@
                 <a:latin typeface="나눔고딕" panose="020D0604000000000000" pitchFamily="50" charset="-127"/>
                 <a:ea typeface="나눔고딕" panose="020D0604000000000000" pitchFamily="50" charset="-127"/>
               </a:rPr>
-              <a:t>0000-0000</a:t>
+              <a:t>1660-2898</a:t>
             </a:r>
             <a:r>
               <a:rPr lang="en-US" altLang="ko-KR" sz="1798" b="1" dirty="0">
@@ -4698,7 +4703,7 @@
                 <a:latin typeface="나눔고딕" panose="020D0604000000000000" pitchFamily="50" charset="-127"/>
                 <a:ea typeface="나눔고딕" panose="020D0604000000000000" pitchFamily="50" charset="-127"/>
               </a:rPr>
-              <a:t>0000-0000</a:t>
+              <a:t>1660-2898</a:t>
             </a:r>
             <a:r>
               <a:rPr lang="en-US" altLang="ko-KR" b="1" u="sng" dirty="0">
@@ -5884,14 +5889,14 @@
               <a:t> </a:t>
             </a:r>
             <a:r>
-              <a:rPr lang="en-US" altLang="ko-KR" sz="900" b="1" dirty="0">
+              <a:rPr lang="ko-KR" altLang="en-US" sz="900" b="1" dirty="0" err="1">
                 <a:highlight>
                   <a:srgbClr val="FFFF00"/>
                 </a:highlight>
                 <a:latin typeface="나눔고딕" pitchFamily="2" charset="-127"/>
                 <a:ea typeface="나눔고딕" pitchFamily="2" charset="-127"/>
               </a:rPr>
-              <a:t>0000000000</a:t>
+              <a:t>레이레이</a:t>
             </a:r>
             <a:r>
               <a:rPr lang="ko-KR" altLang="en-US" sz="900" dirty="0">
@@ -6179,14 +6184,11 @@
               <a:t> </a:t>
             </a:r>
             <a:r>
-              <a:rPr lang="en-US" altLang="ko-KR" sz="900" b="1" dirty="0">
-                <a:highlight>
-                  <a:srgbClr val="FFFF00"/>
-                </a:highlight>
+              <a:rPr lang="ko-KR" altLang="en-US" sz="900" dirty="0" err="1">
                 <a:latin typeface="나눔고딕" pitchFamily="2" charset="-127"/>
                 <a:ea typeface="나눔고딕" pitchFamily="2" charset="-127"/>
               </a:rPr>
-              <a:t>0000000000</a:t>
+              <a:t>레이레이</a:t>
             </a:r>
             <a:r>
               <a:rPr lang="ko-KR" altLang="en-US" sz="900" dirty="0">
@@ -6715,6 +6717,119 @@
               <a:latin typeface="나눔고딕" panose="020D0604000000000000" pitchFamily="50" charset="-127"/>
               <a:ea typeface="나눔고딕" panose="020D0604000000000000" pitchFamily="50" charset="-127"/>
             </a:endParaRPr>
+          </a:p>
+        </p:txBody>
+      </p:sp>
+      <p:sp>
+        <p:nvSpPr>
+          <p:cNvPr id="2" name="직사각형 1">
+            <a:extLst>
+              <a:ext uri="{FF2B5EF4-FFF2-40B4-BE49-F238E27FC236}">
+                <a16:creationId xmlns:a16="http://schemas.microsoft.com/office/drawing/2014/main" id="{F01F4C65-9ADC-BF36-7BBF-B7E209DC9319}"/>
+              </a:ext>
+            </a:extLst>
+          </p:cNvPr>
+          <p:cNvSpPr/>
+          <p:nvPr/>
+        </p:nvSpPr>
+        <p:spPr bwMode="auto">
+          <a:xfrm>
+            <a:off x="7708920" y="4455720"/>
+            <a:ext cx="3168352" cy="431701"/>
+          </a:xfrm>
+          <a:prstGeom prst="rect">
+            <a:avLst/>
+          </a:prstGeom>
+          <a:ln w="9525">
+            <a:headEnd type="none" w="med" len="med"/>
+            <a:tailEnd type="none" w="med" len="med"/>
+          </a:ln>
+        </p:spPr>
+        <p:style>
+          <a:lnRef idx="2">
+            <a:schemeClr val="dk1"/>
+          </a:lnRef>
+          <a:fillRef idx="1">
+            <a:schemeClr val="lt1"/>
+          </a:fillRef>
+          <a:effectRef idx="0">
+            <a:schemeClr val="dk1"/>
+          </a:effectRef>
+          <a:fontRef idx="minor">
+            <a:schemeClr val="dk1"/>
+          </a:fontRef>
+        </p:style>
+        <p:txBody>
+          <a:bodyPr vert="horz" wrap="none" lIns="91440" tIns="45720" rIns="91440" bIns="45720" numCol="1" rtlCol="0" anchor="ctr" anchorCtr="0" compatLnSpc="1">
+            <a:prstTxWarp prst="textNoShape">
+              <a:avLst/>
+            </a:prstTxWarp>
+            <a:noAutofit/>
+          </a:bodyPr>
+          <a:lstStyle/>
+          <a:p>
+            <a:pPr>
+              <a:defRPr/>
+            </a:pPr>
+            <a:r>
+              <a:rPr lang="en-US" altLang="ko-KR" sz="900" dirty="0">
+                <a:latin typeface="나눔고딕" panose="020D0604000000000000" pitchFamily="50" charset="-127"/>
+                <a:ea typeface="나눔고딕" panose="020D0604000000000000" pitchFamily="50" charset="-127"/>
+              </a:rPr>
+              <a:t>It’s Lay Time! </a:t>
+            </a:r>
+          </a:p>
+          <a:p>
+            <a:pPr>
+              <a:defRPr/>
+            </a:pPr>
+            <a:r>
+              <a:rPr lang="ko-KR" altLang="en-US" sz="900" dirty="0">
+                <a:latin typeface="나눔고딕" panose="020D0604000000000000" pitchFamily="50" charset="-127"/>
+                <a:ea typeface="나눔고딕" panose="020D0604000000000000" pitchFamily="50" charset="-127"/>
+              </a:rPr>
+              <a:t>안녕하세요</a:t>
+            </a:r>
+            <a:r>
+              <a:rPr lang="en-US" altLang="ko-KR" sz="900" dirty="0">
+                <a:latin typeface="나눔고딕" panose="020D0604000000000000" pitchFamily="50" charset="-127"/>
+                <a:ea typeface="나눔고딕" panose="020D0604000000000000" pitchFamily="50" charset="-127"/>
+              </a:rPr>
+              <a:t>, </a:t>
+            </a:r>
+            <a:r>
+              <a:rPr lang="ko-KR" altLang="en-US" sz="900" dirty="0" err="1">
+                <a:latin typeface="나눔고딕" panose="020D0604000000000000" pitchFamily="50" charset="-127"/>
+                <a:ea typeface="나눔고딕" panose="020D0604000000000000" pitchFamily="50" charset="-127"/>
+              </a:rPr>
+              <a:t>레이레이입니다</a:t>
+            </a:r>
+            <a:r>
+              <a:rPr lang="en-US" altLang="ko-KR" sz="900" dirty="0">
+                <a:latin typeface="나눔고딕" panose="020D0604000000000000" pitchFamily="50" charset="-127"/>
+                <a:ea typeface="나눔고딕" panose="020D0604000000000000" pitchFamily="50" charset="-127"/>
+              </a:rPr>
+              <a:t>. </a:t>
+            </a:r>
+          </a:p>
+          <a:p>
+            <a:pPr>
+              <a:defRPr/>
+            </a:pPr>
+            <a:r>
+              <a:rPr lang="ko-KR" altLang="en-US" sz="900" dirty="0">
+                <a:latin typeface="나눔고딕" panose="020D0604000000000000" pitchFamily="50" charset="-127"/>
+                <a:ea typeface="나눔고딕" panose="020D0604000000000000" pitchFamily="50" charset="-127"/>
+              </a:rPr>
+              <a:t>잠시만 기다려 주시면 상담원을 연결해 드리겠습니다</a:t>
+            </a:r>
+            <a:r>
+              <a:rPr lang="en-US" altLang="ko-KR" sz="900" dirty="0">
+                <a:latin typeface="나눔고딕" panose="020D0604000000000000" pitchFamily="50" charset="-127"/>
+                <a:ea typeface="나눔고딕" panose="020D0604000000000000" pitchFamily="50" charset="-127"/>
+              </a:rPr>
+              <a:t>.</a:t>
+            </a:r>
           </a:p>
         </p:txBody>
       </p:sp>
